--- a/videos/kit-vs-platform/slides/deck.pptx
+++ b/videos/kit-vs-platform/slides/deck.pptx
@@ -2819,7 +2819,7 @@
                 <a:ea typeface="Space Grotesk" pitchFamily="34" charset="-122"/>
                 <a:cs typeface="Space Grotesk" pitchFamily="34" charset="-120"/>
               </a:rPr>
-              <a:t>TỔ CHỨC F · 28/09/2026</a:t>
+              <a:t>TỔ CHỨC · 28/09/2026</a:t>
             </a:r>
             <a:endParaRPr lang="en-US" sz="1100" dirty="0"/>
           </a:p>
